--- a/docs/presentacion/ENAHO_exposicion_EXPO.pptx
+++ b/docs/presentacion/ENAHO_exposicion_EXPO.pptx
@@ -18,6 +18,7 @@
     <p:sldId id="266" r:id="rId17"/>
     <p:sldId id="267" r:id="rId18"/>
     <p:sldId id="268" r:id="rId19"/>
+    <p:sldId id="269" r:id="rId20"/>
   </p:sldIdLst>
   <p:sldSz cx="12191695" cy="6858000" type="screen4x3"/>
   <p:notesSz cx="6858000" cy="9144000"/>
@@ -842,6 +843,88 @@
           <a:lstStyle/>
           <a:p>
             <a:r>
+              <a:t>QUÉ DIGO — Nada de esto lo inventamos: son prácticas estándar de ingeniería, y esta lámina dice dónde vive cada una en el proyecto. Una sola fuente de verdad: el formulario, estas láminas y la nube leen archivos generados; nadie copia números a mano. Lo pesado se precalcula una vez. Las versiones van fijadas y el generador aborta si divergen. Cada bug que tuvimos quedó convertido en un test. El despliegue no tiene pasos manuales. Y no confiamos: verificamos — el modelo local contra el desplegado, y cada cifra contra su archivo. La corriente va en una sola dirección: entrenamiento → schema → formulario; nadie edita la copia, todos leen la fuente.</a:t>
+            </a:r>
+          </a:p>
+          <a:p/>
+          <a:p>
+            <a:r>
+              <a:t>TÉRMINOS DE ESTA LÁMINA — DRY («don't repeat yourself»): cada dato vive en UN solo lugar y los demás lo leen de ahí — es la caja del diagrama. Fallo silencioso: el error que no revienta; si el formulario escribiera «hasta 20 trabajadores» donde el modelo aprendió «Hasta 20», el modelo no explota — predice basura sin avisar. Con el schema ese error no puede existir, porque el menú y el modelo leen el mismo archivo. Antipatrón: la solución que se sabe que sale mal — aquí, mantener dos copias del mismo dato (el lado tachado del diagrama). Webhook: el aviso automático de GitHub a la nube.</a:t>
+            </a:r>
+          </a:p>
+          <a:p/>
+          <a:p>
+            <a:r>
+              <a:t>SI PREGUNTAN — ¿Y si alguien quiere cambiar una opción del formulario? No puede hacerlo a mano: tendría que cambiar el schema, que sale del entrenamiento — y entonces el formulario, la app y estas láminas cambian juntos. Esa es exactamente la gracia de la fuente única.</a:t>
+            </a:r>
+          </a:p>
+        </p:txBody>
+      </p:sp>
+      <p:sp>
+        <p:nvSpPr>
+          <p:cNvPr id="4" name="Slide Number Placeholder 3"/>
+          <p:cNvSpPr>
+            <a:spLocks noGrp="1"/>
+          </p:cNvSpPr>
+          <p:nvPr>
+            <p:ph type="sldNum" idx="5" sz="quarter"/>
+          </p:nvPr>
+        </p:nvSpPr>
+        <p:spPr/>
+      </p:sp>
+    </p:spTree>
+  </p:cSld>
+  <p:clrMapOvr>
+    <a:masterClrMapping/>
+  </p:clrMapOvr>
+</p:notes>
+</file>
+
+<file path=ppt/notesSlides/notesSlide14.xml><?xml version="1.0" encoding="utf-8"?>
+<p:notes xmlns:a="http://schemas.openxmlformats.org/drawingml/2006/main" xmlns:p="http://schemas.openxmlformats.org/presentationml/2006/main" xmlns:r="http://schemas.openxmlformats.org/officeDocument/2006/relationships">
+  <p:cSld>
+    <p:spTree>
+      <p:nvGrpSpPr>
+        <p:cNvPr id="1" name=""/>
+        <p:cNvGrpSpPr/>
+        <p:nvPr/>
+      </p:nvGrpSpPr>
+      <p:grpSpPr>
+        <a:xfrm>
+          <a:off x="0" y="0"/>
+          <a:ext cx="0" cy="0"/>
+          <a:chOff x="0" y="0"/>
+          <a:chExt cx="0" cy="0"/>
+        </a:xfrm>
+      </p:grpSpPr>
+      <p:sp>
+        <p:nvSpPr>
+          <p:cNvPr id="2" name="Slide Image Placeholder 1"/>
+          <p:cNvSpPr>
+            <a:spLocks noGrp="1"/>
+          </p:cNvSpPr>
+          <p:nvPr>
+            <p:ph type="sldImg" idx="2"/>
+          </p:nvPr>
+        </p:nvSpPr>
+        <p:spPr/>
+      </p:sp>
+      <p:sp>
+        <p:nvSpPr>
+          <p:cNvPr id="3" name="Notes Placeholder 2"/>
+          <p:cNvSpPr>
+            <a:spLocks noGrp="1"/>
+          </p:cNvSpPr>
+          <p:nvPr>
+            <p:ph type="body" idx="3" sz="quarter"/>
+          </p:nvPr>
+        </p:nvSpPr>
+        <p:spPr/>
+        <p:txBody>
+          <a:bodyPr/>
+          <a:lstStyle/>
+          <a:p>
+            <a:r>
               <a:t>QUÉ DIGO — Para cerrar, los límites, que también son parte del trabajo. El regresor compara perfiles: dice el ingreso típico de gente como la del perfil, con un error promedio de unos S/ 611 al mes; no le dice a nadie cuánto va a cobrar. El clasificador señala configuraciones de empleo que se asocian a informalidad; no predice el futuro ni juzga personas. Del despliegue nos llevamos dos aprendizajes: fijar las versiones exactas, porque un modelo guardado no viaja entre versiones, y dejar todo lo pesado calculado de antemano. Los enlaces están en la portada. Gracias.</a:t>
             </a:r>
           </a:p>
@@ -1088,7 +1171,7 @@
           <a:lstStyle/>
           <a:p>
             <a:r>
-              <a:t>QUÉ DIGO — Esta lámina sostiene todo lo demás. Entrenamos en nuestra computadora y de ahí sale un paquete chico: el código y los resultados ya calculados, 8,85 megas en 111 archivos. Ese paquete se sube a GitHub con un push. GitHub le avisa a Streamlit Cloud, y la nube reconstruye la app y la publica sola. Entre guardar el cambio y verlo en el navegador no hay ningún paso manual. Y los datos originales del INEI, 601,3 megas, nunca salen de la máquina: el repositorio enlaza a la fuente oficial.</a:t>
+              <a:t>QUÉ DIGO — Esta lámina sostiene todo lo demás. Entrenamos en nuestra computadora y de ahí sale un paquete chico: el código y los resultados ya calculados, 8,86 megas en 112 archivos. Ese paquete se sube a GitHub con un push. GitHub le avisa a Streamlit Cloud, y la nube reconstruye la app y la publica sola. Entre guardar el cambio y verlo en el navegador no hay ningún paso manual. Y los datos originales del INEI, 601,3 megas, nunca salen de la máquina: el README deja el enlace al portal del INEI solo para quien quiera reproducir todo — la app nunca descarga nada del INEI.</a:t>
             </a:r>
           </a:p>
           <a:p/>
@@ -1100,7 +1183,7 @@
           <a:p/>
           <a:p>
             <a:r>
-              <a:t>SI PREGUNTAN — ¿Y si Streamlit Cloud se cae o se borra la app? No se pierde nada: en Streamlit no vive nada que no esté en GitHub. Se vuelve a conectar el repositorio y la app renace idéntica, porque la nube solo clona, instala y ejecuta.</a:t>
+              <a:t>SI PREGUNTAN — ¿Y si Streamlit Cloud se cae, o se borra hasta la carpeta local? No se pierde nada: en Streamlit no vive nada que no esté en GitHub — se reconecta el repositorio y la app renace idéntica —, los microdatos se vuelven a bajar del portal del INEI y los artefactos se regeneran corriendo el código. Todo lo que no sube es recuperable o regenerable.</a:t>
             </a:r>
           </a:p>
         </p:txBody>
@@ -1170,7 +1253,7 @@
           <a:lstStyle/>
           <a:p>
             <a:r>
-              <a:t>QUÉ DIGO — Cuando alguien abre la app, el modelo no se ejecuta ni una vez: todos los gráficos y tablas ya estaban calculados desde el entrenamiento, guardados en un archivo de 44,7 kilobytes que la app solo lee y dibuja. El modelo trabaja únicamente cuando el usuario arma su perfil y pulsa «Estimar»: una sola predicción, que para el perfil por defecto da S/ 849. Por eso la app carga rápido y no se cae: la nube gratuita da poca memoria, y todo lo pesado quedó fuera del momento en que alguien la mira.</a:t>
+              <a:t>QUÉ DIGO — Cuando alguien abre la app, el modelo no se ejecuta ni una vez: todos los gráficos y tablas ya estaban calculados desde el entrenamiento, guardados en un archivo de 44,7 kilobytes que la app solo lee y dibuja. El modelo trabaja únicamente cuando el usuario arma su perfil y pulsa «Estimar»: una sola predicción, que para el perfil por defecto da S/ 849. La escalera del medio es la decisión en cifras: si subiéramos la base entera y calculáramos en el servidor, la app cargaría lenta y se quedaría sin memoria; por eso se precalcula una vez y en cada visita solo se lee.</a:t>
             </a:r>
           </a:p>
           <a:p/>
@@ -5182,7 +5265,7 @@
         <p:spPr>
           <a:xfrm>
             <a:off x="8101583" y="2084831"/>
-            <a:ext cx="3520440" cy="1207008"/>
+            <a:ext cx="3520440" cy="1170432"/>
           </a:xfrm>
           <a:prstGeom prst="roundRect">
             <a:avLst>
@@ -5242,7 +5325,7 @@
               </a:spcAft>
             </a:pPr>
             <a:r>
-              <a:rPr sz="3000" b="1">
+              <a:rPr sz="2800" b="1">
                 <a:solidFill>
                   <a:srgbClr val="4353CC"/>
                 </a:solidFill>
@@ -5280,8 +5363,8 @@
         </p:nvSpPr>
         <p:spPr>
           <a:xfrm>
-            <a:off x="8101583" y="3401568"/>
-            <a:ext cx="3520440" cy="1207008"/>
+            <a:off x="8101583" y="3364991"/>
+            <a:ext cx="3520440" cy="1170432"/>
           </a:xfrm>
           <a:prstGeom prst="roundRect">
             <a:avLst>
@@ -5341,7 +5424,7 @@
               </a:spcAft>
             </a:pPr>
             <a:r>
-              <a:rPr sz="3000" b="1">
+              <a:rPr sz="2800" b="1">
                 <a:solidFill>
                   <a:srgbClr val="4353CC"/>
                 </a:solidFill>
@@ -5379,8 +5462,8 @@
         </p:nvSpPr>
         <p:spPr>
           <a:xfrm>
-            <a:off x="8101583" y="4718304"/>
-            <a:ext cx="3520440" cy="1645920"/>
+            <a:off x="8101583" y="4645152"/>
+            <a:ext cx="3520440" cy="1609344"/>
           </a:xfrm>
           <a:prstGeom prst="roundRect">
             <a:avLst>
@@ -5439,7 +5522,7 @@
                 <a:spcPct val="100000"/>
               </a:lnSpc>
               <a:spcAft>
-                <a:spcPts val="500"/>
+                <a:spcPts val="400"/>
               </a:spcAft>
             </a:pPr>
             <a:r>
@@ -5467,7 +5550,7 @@
                 <a:spcPct val="100000"/>
               </a:lnSpc>
               <a:spcAft>
-                <a:spcPts val="500"/>
+                <a:spcPts val="400"/>
               </a:spcAft>
             </a:pPr>
             <a:r>
@@ -5495,7 +5578,7 @@
                 <a:spcPct val="100000"/>
               </a:lnSpc>
               <a:spcAft>
-                <a:spcPts val="500"/>
+                <a:spcPts val="400"/>
               </a:spcAft>
             </a:pPr>
             <a:r>
@@ -6949,6 +7032,726 @@
 </file>
 
 <file path=ppt/slides/slide13.xml><?xml version="1.0" encoding="utf-8"?>
+<p:sld xmlns:a="http://schemas.openxmlformats.org/drawingml/2006/main" xmlns:p="http://schemas.openxmlformats.org/presentationml/2006/main" xmlns:r="http://schemas.openxmlformats.org/officeDocument/2006/relationships">
+  <p:cSld>
+    <p:bg>
+      <p:bgPr>
+        <a:solidFill>
+          <a:srgbClr val="F7F5F0"/>
+        </a:solidFill>
+        <a:effectLst/>
+      </p:bgPr>
+    </p:bg>
+    <p:spTree>
+      <p:nvGrpSpPr>
+        <p:cNvPr id="1" name=""/>
+        <p:cNvGrpSpPr/>
+        <p:nvPr/>
+      </p:nvGrpSpPr>
+      <p:grpSpPr/>
+      <p:sp>
+        <p:nvSpPr>
+          <p:cNvPr id="2" name="Rectangle 1"/>
+          <p:cNvSpPr/>
+          <p:nvPr/>
+        </p:nvSpPr>
+        <p:spPr>
+          <a:xfrm>
+            <a:off x="0" y="0"/>
+            <a:ext cx="12191695" cy="64008"/>
+          </a:xfrm>
+          <a:prstGeom prst="rect">
+            <a:avLst/>
+          </a:prstGeom>
+          <a:solidFill>
+            <a:srgbClr val="4353CC"/>
+          </a:solidFill>
+          <a:ln>
+            <a:noFill/>
+          </a:ln>
+          <a:effectLst/>
+        </p:spPr>
+        <p:style>
+          <a:lnRef idx="1">
+            <a:schemeClr val="accent1"/>
+          </a:lnRef>
+          <a:fillRef idx="3">
+            <a:schemeClr val="accent1"/>
+          </a:fillRef>
+          <a:effectRef idx="2">
+            <a:schemeClr val="accent1"/>
+          </a:effectRef>
+          <a:fontRef idx="minor">
+            <a:schemeClr val="lt1"/>
+          </a:fontRef>
+        </p:style>
+        <p:txBody>
+          <a:bodyPr rtlCol="0" anchor="ctr"/>
+          <a:lstStyle/>
+          <a:p>
+            <a:pPr algn="ctr"/>
+          </a:p>
+        </p:txBody>
+      </p:sp>
+      <p:sp>
+        <p:nvSpPr>
+          <p:cNvPr id="3" name="TextBox 2"/>
+          <p:cNvSpPr txBox="1"/>
+          <p:nvPr/>
+        </p:nvSpPr>
+        <p:spPr>
+          <a:xfrm>
+            <a:off x="566928" y="384048"/>
+            <a:ext cx="11057839" cy="969264"/>
+          </a:xfrm>
+          <a:prstGeom prst="rect">
+            <a:avLst/>
+          </a:prstGeom>
+          <a:noFill/>
+        </p:spPr>
+        <p:txBody>
+          <a:bodyPr wrap="square" lIns="0" rIns="0" tIns="0" bIns="0">
+            <a:spAutoFit/>
+          </a:bodyPr>
+          <a:lstStyle/>
+          <a:p>
+            <a:pPr>
+              <a:lnSpc>
+                <a:spcPct val="92000"/>
+              </a:lnSpc>
+              <a:spcAft>
+                <a:spcPts val="0"/>
+              </a:spcAft>
+            </a:pPr>
+            <a:r>
+              <a:rPr sz="3600" b="1">
+                <a:solidFill>
+                  <a:srgbClr val="1E232B"/>
+                </a:solidFill>
+                <a:latin typeface="Calibri"/>
+              </a:rPr>
+              <a:t>Las prácticas que sostienen el código</a:t>
+            </a:r>
+          </a:p>
+        </p:txBody>
+      </p:sp>
+      <p:sp>
+        <p:nvSpPr>
+          <p:cNvPr id="4" name="TextBox 3"/>
+          <p:cNvSpPr txBox="1"/>
+          <p:nvPr/>
+        </p:nvSpPr>
+        <p:spPr>
+          <a:xfrm>
+            <a:off x="566928" y="1408176"/>
+            <a:ext cx="10881360" cy="603504"/>
+          </a:xfrm>
+          <a:prstGeom prst="rect">
+            <a:avLst/>
+          </a:prstGeom>
+          <a:noFill/>
+        </p:spPr>
+        <p:txBody>
+          <a:bodyPr wrap="square" lIns="0" rIns="0" tIns="0" bIns="0">
+            <a:spAutoFit/>
+          </a:bodyPr>
+          <a:lstStyle/>
+          <a:p>
+            <a:pPr>
+              <a:lnSpc>
+                <a:spcPct val="102000"/>
+              </a:lnSpc>
+              <a:spcAft>
+                <a:spcPts val="0"/>
+              </a:spcAft>
+            </a:pPr>
+            <a:r>
+              <a:rPr sz="2000" b="0">
+                <a:solidFill>
+                  <a:srgbClr val="49525F"/>
+                </a:solidFill>
+                <a:latin typeface="Calibri"/>
+              </a:rPr>
+              <a:t>Seis prácticas de ingeniería, cada una con su lugar concreto en este proyecto y el error que evita.</a:t>
+            </a:r>
+          </a:p>
+        </p:txBody>
+      </p:sp>
+      <p:pic>
+        <p:nvPicPr>
+          <p:cNvPr id="5" name="Picture 4" descr="fig_una_fuente.png"/>
+          <p:cNvPicPr>
+            <a:picLocks noChangeAspect="1"/>
+          </p:cNvPicPr>
+          <p:nvPr/>
+        </p:nvPicPr>
+        <p:blipFill>
+          <a:blip r:embed="rId2"/>
+          <a:stretch>
+            <a:fillRect/>
+          </a:stretch>
+        </p:blipFill>
+        <p:spPr>
+          <a:xfrm>
+            <a:off x="1791459" y="2066543"/>
+            <a:ext cx="8606032" cy="1188720"/>
+          </a:xfrm>
+          <a:prstGeom prst="rect">
+            <a:avLst/>
+          </a:prstGeom>
+        </p:spPr>
+      </p:pic>
+      <p:graphicFrame>
+        <p:nvGraphicFramePr>
+          <p:cNvPr id="6" name="Table 5"/>
+          <p:cNvGraphicFramePr>
+            <a:graphicFrameLocks noGrp="1"/>
+          </p:cNvGraphicFramePr>
+          <p:nvPr/>
+        </p:nvGraphicFramePr>
+        <p:xfrm>
+          <a:off x="566928" y="3419856"/>
+          <a:ext cx="11055095" cy="2331720"/>
+        </p:xfrm>
+        <a:graphic>
+          <a:graphicData uri="http://schemas.openxmlformats.org/drawingml/2006/table">
+            <a:tbl>
+              <a:tblPr firstRow="1" bandRow="1">
+                <a:tableStyleId>{5C22544A-7EE6-4342-B048-85BDC9FD1C3A}</a:tableStyleId>
+              </a:tblPr>
+              <a:tblGrid>
+                <a:gridCol w="2211019"/>
+                <a:gridCol w="5527548"/>
+                <a:gridCol w="3316528"/>
+              </a:tblGrid>
+              <a:tr h="333102">
+                <a:tc>
+                  <a:txBody>
+                    <a:bodyPr wrap="square"/>
+                    <a:lstStyle/>
+                    <a:p>
+                      <a:r>
+                        <a:rPr sz="1600" b="1">
+                          <a:solidFill>
+                            <a:srgbClr val="5F6875"/>
+                          </a:solidFill>
+                          <a:latin typeface="Calibri"/>
+                        </a:rPr>
+                        <a:t>Práctica</a:t>
+                      </a:r>
+                    </a:p>
+                  </a:txBody>
+                  <a:tcPr marL="91440" marR="91440" marT="45720" marB="45720" anchor="ctr">
+                    <a:solidFill>
+                      <a:srgbClr val="F1EFE8"/>
+                    </a:solidFill>
+                  </a:tcPr>
+                </a:tc>
+                <a:tc>
+                  <a:txBody>
+                    <a:bodyPr wrap="square"/>
+                    <a:lstStyle/>
+                    <a:p>
+                      <a:r>
+                        <a:rPr sz="1600" b="1">
+                          <a:solidFill>
+                            <a:srgbClr val="5F6875"/>
+                          </a:solidFill>
+                          <a:latin typeface="Calibri"/>
+                        </a:rPr>
+                        <a:t>Dónde vive en este proyecto</a:t>
+                      </a:r>
+                    </a:p>
+                  </a:txBody>
+                  <a:tcPr marL="91440" marR="91440" marT="45720" marB="45720" anchor="ctr">
+                    <a:solidFill>
+                      <a:srgbClr val="F1EFE8"/>
+                    </a:solidFill>
+                  </a:tcPr>
+                </a:tc>
+                <a:tc>
+                  <a:txBody>
+                    <a:bodyPr wrap="square"/>
+                    <a:lstStyle/>
+                    <a:p>
+                      <a:r>
+                        <a:rPr sz="1600" b="1">
+                          <a:solidFill>
+                            <a:srgbClr val="5F6875"/>
+                          </a:solidFill>
+                          <a:latin typeface="Calibri"/>
+                        </a:rPr>
+                        <a:t>Qué error evita</a:t>
+                      </a:r>
+                    </a:p>
+                  </a:txBody>
+                  <a:tcPr marL="91440" marR="91440" marT="45720" marB="45720" anchor="ctr">
+                    <a:solidFill>
+                      <a:srgbClr val="F1EFE8"/>
+                    </a:solidFill>
+                  </a:tcPr>
+                </a:tc>
+              </a:tr>
+              <a:tr h="333102">
+                <a:tc>
+                  <a:txBody>
+                    <a:bodyPr wrap="square"/>
+                    <a:lstStyle/>
+                    <a:p>
+                      <a:r>
+                        <a:rPr sz="1600" b="0">
+                          <a:solidFill>
+                            <a:srgbClr val="1E232B"/>
+                          </a:solidFill>
+                          <a:latin typeface="Calibri"/>
+                        </a:rPr>
+                        <a:t>Fuente única (DRY)</a:t>
+                      </a:r>
+                    </a:p>
+                  </a:txBody>
+                  <a:tcPr marL="91440" marR="91440" marT="45720" marB="45720" anchor="ctr">
+                    <a:solidFill>
+                      <a:srgbClr val="FCFBF8"/>
+                    </a:solidFill>
+                  </a:tcPr>
+                </a:tc>
+                <a:tc>
+                  <a:txBody>
+                    <a:bodyPr wrap="square"/>
+                    <a:lstStyle/>
+                    <a:p>
+                      <a:r>
+                        <a:rPr sz="1600" b="0">
+                          <a:solidFill>
+                            <a:srgbClr val="1E232B"/>
+                          </a:solidFill>
+                          <a:latin typeface="Calibri"/>
+                        </a:rPr>
+                        <a:t>schema→formulario · artefactos→PPT · requirements→nube</a:t>
+                      </a:r>
+                    </a:p>
+                  </a:txBody>
+                  <a:tcPr marL="91440" marR="91440" marT="45720" marB="45720" anchor="ctr">
+                    <a:solidFill>
+                      <a:srgbClr val="FCFBF8"/>
+                    </a:solidFill>
+                  </a:tcPr>
+                </a:tc>
+                <a:tc>
+                  <a:txBody>
+                    <a:bodyPr wrap="square"/>
+                    <a:lstStyle/>
+                    <a:p>
+                      <a:r>
+                        <a:rPr sz="1600" b="0">
+                          <a:solidFill>
+                            <a:srgbClr val="1E232B"/>
+                          </a:solidFill>
+                          <a:latin typeface="Calibri"/>
+                        </a:rPr>
+                        <a:t>Dos copias que se contradicen</a:t>
+                      </a:r>
+                    </a:p>
+                  </a:txBody>
+                  <a:tcPr marL="91440" marR="91440" marT="45720" marB="45720" anchor="ctr">
+                    <a:solidFill>
+                      <a:srgbClr val="FCFBF8"/>
+                    </a:solidFill>
+                  </a:tcPr>
+                </a:tc>
+              </a:tr>
+              <a:tr h="333102">
+                <a:tc>
+                  <a:txBody>
+                    <a:bodyPr wrap="square"/>
+                    <a:lstStyle/>
+                    <a:p>
+                      <a:r>
+                        <a:rPr sz="1600" b="0">
+                          <a:solidFill>
+                            <a:srgbClr val="1E232B"/>
+                          </a:solidFill>
+                          <a:latin typeface="Calibri"/>
+                        </a:rPr>
+                        <a:t>Precomputar lo pesado</a:t>
+                      </a:r>
+                    </a:p>
+                  </a:txBody>
+                  <a:tcPr marL="91440" marR="91440" marT="45720" marB="45720" anchor="ctr">
+                    <a:solidFill>
+                      <a:srgbClr val="FCFBF8"/>
+                    </a:solidFill>
+                  </a:tcPr>
+                </a:tc>
+                <a:tc>
+                  <a:txBody>
+                    <a:bodyPr wrap="square"/>
+                    <a:lstStyle/>
+                    <a:p>
+                      <a:r>
+                        <a:rPr sz="1600" b="0">
+                          <a:solidFill>
+                            <a:srgbClr val="1E232B"/>
+                          </a:solidFill>
+                          <a:latin typeface="Calibri"/>
+                        </a:rPr>
+                        <a:t>src/09 → ui_artifacts.json (44,7 KB), la app solo lee</a:t>
+                      </a:r>
+                    </a:p>
+                  </a:txBody>
+                  <a:tcPr marL="91440" marR="91440" marT="45720" marB="45720" anchor="ctr">
+                    <a:solidFill>
+                      <a:srgbClr val="FCFBF8"/>
+                    </a:solidFill>
+                  </a:tcPr>
+                </a:tc>
+                <a:tc>
+                  <a:txBody>
+                    <a:bodyPr wrap="square"/>
+                    <a:lstStyle/>
+                    <a:p>
+                      <a:r>
+                        <a:rPr sz="1600" b="0">
+                          <a:solidFill>
+                            <a:srgbClr val="1E232B"/>
+                          </a:solidFill>
+                          <a:latin typeface="Calibri"/>
+                        </a:rPr>
+                        <a:t>App lenta o sin memoria</a:t>
+                      </a:r>
+                    </a:p>
+                  </a:txBody>
+                  <a:tcPr marL="91440" marR="91440" marT="45720" marB="45720" anchor="ctr">
+                    <a:solidFill>
+                      <a:srgbClr val="FCFBF8"/>
+                    </a:solidFill>
+                  </a:tcPr>
+                </a:tc>
+              </a:tr>
+              <a:tr h="333102">
+                <a:tc>
+                  <a:txBody>
+                    <a:bodyPr wrap="square"/>
+                    <a:lstStyle/>
+                    <a:p>
+                      <a:r>
+                        <a:rPr sz="1600" b="0">
+                          <a:solidFill>
+                            <a:srgbClr val="1E232B"/>
+                          </a:solidFill>
+                          <a:latin typeface="Calibri"/>
+                        </a:rPr>
+                        <a:t>Versiones fijadas</a:t>
+                      </a:r>
+                    </a:p>
+                  </a:txBody>
+                  <a:tcPr marL="91440" marR="91440" marT="45720" marB="45720" anchor="ctr">
+                    <a:solidFill>
+                      <a:srgbClr val="FCFBF8"/>
+                    </a:solidFill>
+                  </a:tcPr>
+                </a:tc>
+                <a:tc>
+                  <a:txBody>
+                    <a:bodyPr wrap="square"/>
+                    <a:lstStyle/>
+                    <a:p>
+                      <a:r>
+                        <a:rPr sz="1600" b="0">
+                          <a:solidFill>
+                            <a:srgbClr val="1E232B"/>
+                          </a:solidFill>
+                          <a:latin typeface="Calibri"/>
+                        </a:rPr>
+                        <a:t>requirements.txt = meta del artefacto, o se aborta</a:t>
+                      </a:r>
+                    </a:p>
+                  </a:txBody>
+                  <a:tcPr marL="91440" marR="91440" marT="45720" marB="45720" anchor="ctr">
+                    <a:solidFill>
+                      <a:srgbClr val="FCFBF8"/>
+                    </a:solidFill>
+                  </a:tcPr>
+                </a:tc>
+                <a:tc>
+                  <a:txBody>
+                    <a:bodyPr wrap="square"/>
+                    <a:lstStyle/>
+                    <a:p>
+                      <a:r>
+                        <a:rPr sz="1600" b="0">
+                          <a:solidFill>
+                            <a:srgbClr val="1E232B"/>
+                          </a:solidFill>
+                          <a:latin typeface="Calibri"/>
+                        </a:rPr>
+                        <a:t>Un modelo distinto en la nube</a:t>
+                      </a:r>
+                    </a:p>
+                  </a:txBody>
+                  <a:tcPr marL="91440" marR="91440" marT="45720" marB="45720" anchor="ctr">
+                    <a:solidFill>
+                      <a:srgbClr val="FCFBF8"/>
+                    </a:solidFill>
+                  </a:tcPr>
+                </a:tc>
+              </a:tr>
+              <a:tr h="333102">
+                <a:tc>
+                  <a:txBody>
+                    <a:bodyPr wrap="square"/>
+                    <a:lstStyle/>
+                    <a:p>
+                      <a:r>
+                        <a:rPr sz="1600" b="0">
+                          <a:solidFill>
+                            <a:srgbClr val="1E232B"/>
+                          </a:solidFill>
+                          <a:latin typeface="Calibri"/>
+                        </a:rPr>
+                        <a:t>Cada bug, un test</a:t>
+                      </a:r>
+                    </a:p>
+                  </a:txBody>
+                  <a:tcPr marL="91440" marR="91440" marT="45720" marB="45720" anchor="ctr">
+                    <a:solidFill>
+                      <a:srgbClr val="FCFBF8"/>
+                    </a:solidFill>
+                  </a:tcPr>
+                </a:tc>
+                <a:tc>
+                  <a:txBody>
+                    <a:bodyPr wrap="square"/>
+                    <a:lstStyle/>
+                    <a:p>
+                      <a:r>
+                        <a:rPr sz="1600" b="0">
+                          <a:solidFill>
+                            <a:srgbClr val="1E232B"/>
+                          </a:solidFill>
+                          <a:latin typeface="Calibri"/>
+                        </a:rPr>
+                        <a:t>test_contratos.py reproduce los tres fallos del 20/08</a:t>
+                      </a:r>
+                    </a:p>
+                  </a:txBody>
+                  <a:tcPr marL="91440" marR="91440" marT="45720" marB="45720" anchor="ctr">
+                    <a:solidFill>
+                      <a:srgbClr val="FCFBF8"/>
+                    </a:solidFill>
+                  </a:tcPr>
+                </a:tc>
+                <a:tc>
+                  <a:txBody>
+                    <a:bodyPr wrap="square"/>
+                    <a:lstStyle/>
+                    <a:p>
+                      <a:r>
+                        <a:rPr sz="1600" b="0">
+                          <a:solidFill>
+                            <a:srgbClr val="1E232B"/>
+                          </a:solidFill>
+                          <a:latin typeface="Calibri"/>
+                        </a:rPr>
+                        <a:t>Que el mismo error regrese</a:t>
+                      </a:r>
+                    </a:p>
+                  </a:txBody>
+                  <a:tcPr marL="91440" marR="91440" marT="45720" marB="45720" anchor="ctr">
+                    <a:solidFill>
+                      <a:srgbClr val="FCFBF8"/>
+                    </a:solidFill>
+                  </a:tcPr>
+                </a:tc>
+              </a:tr>
+              <a:tr h="333102">
+                <a:tc>
+                  <a:txBody>
+                    <a:bodyPr wrap="square"/>
+                    <a:lstStyle/>
+                    <a:p>
+                      <a:r>
+                        <a:rPr sz="1600" b="0">
+                          <a:solidFill>
+                            <a:srgbClr val="1E232B"/>
+                          </a:solidFill>
+                          <a:latin typeface="Calibri"/>
+                        </a:rPr>
+                        <a:t>Despliegue sin manos</a:t>
+                      </a:r>
+                    </a:p>
+                  </a:txBody>
+                  <a:tcPr marL="91440" marR="91440" marT="45720" marB="45720" anchor="ctr">
+                    <a:solidFill>
+                      <a:srgbClr val="FCFBF8"/>
+                    </a:solidFill>
+                  </a:tcPr>
+                </a:tc>
+                <a:tc>
+                  <a:txBody>
+                    <a:bodyPr wrap="square"/>
+                    <a:lstStyle/>
+                    <a:p>
+                      <a:r>
+                        <a:rPr sz="1600" b="0">
+                          <a:solidFill>
+                            <a:srgbClr val="1E232B"/>
+                          </a:solidFill>
+                          <a:latin typeface="Calibri"/>
+                        </a:rPr>
+                        <a:t>push → webhook → redeploy automático</a:t>
+                      </a:r>
+                    </a:p>
+                  </a:txBody>
+                  <a:tcPr marL="91440" marR="91440" marT="45720" marB="45720" anchor="ctr">
+                    <a:solidFill>
+                      <a:srgbClr val="FCFBF8"/>
+                    </a:solidFill>
+                  </a:tcPr>
+                </a:tc>
+                <a:tc>
+                  <a:txBody>
+                    <a:bodyPr wrap="square"/>
+                    <a:lstStyle/>
+                    <a:p>
+                      <a:r>
+                        <a:rPr sz="1600" b="0">
+                          <a:solidFill>
+                            <a:srgbClr val="1E232B"/>
+                          </a:solidFill>
+                          <a:latin typeface="Calibri"/>
+                        </a:rPr>
+                        <a:t>Pasos manuales que se olvidan</a:t>
+                      </a:r>
+                    </a:p>
+                  </a:txBody>
+                  <a:tcPr marL="91440" marR="91440" marT="45720" marB="45720" anchor="ctr">
+                    <a:solidFill>
+                      <a:srgbClr val="FCFBF8"/>
+                    </a:solidFill>
+                  </a:tcPr>
+                </a:tc>
+              </a:tr>
+              <a:tr h="333108">
+                <a:tc>
+                  <a:txBody>
+                    <a:bodyPr wrap="square"/>
+                    <a:lstStyle/>
+                    <a:p>
+                      <a:r>
+                        <a:rPr sz="1600" b="0">
+                          <a:solidFill>
+                            <a:srgbClr val="1E232B"/>
+                          </a:solidFill>
+                          <a:latin typeface="Calibri"/>
+                        </a:rPr>
+                        <a:t>Verificar, no confiar</a:t>
+                      </a:r>
+                    </a:p>
+                  </a:txBody>
+                  <a:tcPr marL="91440" marR="91440" marT="45720" marB="45720" anchor="ctr">
+                    <a:solidFill>
+                      <a:srgbClr val="FCFBF8"/>
+                    </a:solidFill>
+                  </a:tcPr>
+                </a:tc>
+                <a:tc>
+                  <a:txBody>
+                    <a:bodyPr wrap="square"/>
+                    <a:lstStyle/>
+                    <a:p>
+                      <a:r>
+                        <a:rPr sz="1600" b="0">
+                          <a:solidFill>
+                            <a:srgbClr val="1E232B"/>
+                          </a:solidFill>
+                          <a:latin typeface="Calibri"/>
+                        </a:rPr>
+                        <a:t>local = desplegado · verificar_ppt.py traza cada cifra</a:t>
+                      </a:r>
+                    </a:p>
+                  </a:txBody>
+                  <a:tcPr marL="91440" marR="91440" marT="45720" marB="45720" anchor="ctr">
+                    <a:solidFill>
+                      <a:srgbClr val="FCFBF8"/>
+                    </a:solidFill>
+                  </a:tcPr>
+                </a:tc>
+                <a:tc>
+                  <a:txBody>
+                    <a:bodyPr wrap="square"/>
+                    <a:lstStyle/>
+                    <a:p>
+                      <a:r>
+                        <a:rPr sz="1600" b="0">
+                          <a:solidFill>
+                            <a:srgbClr val="1E232B"/>
+                          </a:solidFill>
+                          <a:latin typeface="Calibri"/>
+                        </a:rPr>
+                        <a:t>Números dichos de memoria</a:t>
+                      </a:r>
+                    </a:p>
+                  </a:txBody>
+                  <a:tcPr marL="91440" marR="91440" marT="45720" marB="45720" anchor="ctr">
+                    <a:solidFill>
+                      <a:srgbClr val="FCFBF8"/>
+                    </a:solidFill>
+                  </a:tcPr>
+                </a:tc>
+              </a:tr>
+            </a:tbl>
+          </a:graphicData>
+        </a:graphic>
+      </p:graphicFrame>
+      <p:sp>
+        <p:nvSpPr>
+          <p:cNvPr id="7" name="TextBox 6"/>
+          <p:cNvSpPr txBox="1"/>
+          <p:nvPr/>
+        </p:nvSpPr>
+        <p:spPr>
+          <a:xfrm>
+            <a:off x="566928" y="6419088"/>
+            <a:ext cx="11057839" cy="310896"/>
+          </a:xfrm>
+          <a:prstGeom prst="rect">
+            <a:avLst/>
+          </a:prstGeom>
+          <a:noFill/>
+        </p:spPr>
+        <p:txBody>
+          <a:bodyPr wrap="square" lIns="0" rIns="0" tIns="0" bIns="0">
+            <a:spAutoFit/>
+          </a:bodyPr>
+          <a:lstStyle/>
+          <a:p>
+            <a:pPr>
+              <a:spcAft>
+                <a:spcPts val="0"/>
+              </a:spcAft>
+            </a:pPr>
+            <a:r>
+              <a:rPr sz="1200" b="0">
+                <a:solidFill>
+                  <a:srgbClr val="5F6875"/>
+                </a:solidFill>
+                <a:latin typeface="Calibri"/>
+              </a:rPr>
+              <a:t>Fuente: models/feature_schema.json · models/ui_artifacts.json · requirements.txt · tests/test_contratos.py · docs/presentacion/verificar_ppt.py</a:t>
+            </a:r>
+          </a:p>
+        </p:txBody>
+      </p:sp>
+    </p:spTree>
+  </p:cSld>
+  <p:clrMapOvr>
+    <a:masterClrMapping/>
+  </p:clrMapOvr>
+</p:sld>
+</file>
+
+<file path=ppt/slides/slide14.xml><?xml version="1.0" encoding="utf-8"?>
 <p:sld xmlns:a="http://schemas.openxmlformats.org/drawingml/2006/main" xmlns:p="http://schemas.openxmlformats.org/presentationml/2006/main" xmlns:r="http://schemas.openxmlformats.org/officeDocument/2006/relationships">
   <p:cSld>
     <p:bg>
@@ -9242,8 +10045,8 @@
         </p:blipFill>
         <p:spPr>
           <a:xfrm>
-            <a:off x="1943553" y="2066543"/>
-            <a:ext cx="8301844" cy="3200399"/>
+            <a:off x="2465383" y="2066543"/>
+            <a:ext cx="7258184" cy="2798063"/>
           </a:xfrm>
           <a:prstGeom prst="rect">
             <a:avLst/>
@@ -9258,8 +10061,8 @@
         </p:nvSpPr>
         <p:spPr>
           <a:xfrm>
-            <a:off x="566928" y="5413248"/>
-            <a:ext cx="11055096" cy="804672"/>
+            <a:off x="566928" y="4992623"/>
+            <a:ext cx="11055096" cy="1207008"/>
           </a:xfrm>
           <a:prstGeom prst="roundRect">
             <a:avLst>
@@ -9296,20 +10099,39 @@
           <a:p>
             <a:pPr algn="ctr">
               <a:lnSpc>
-                <a:spcPct val="106000"/>
+                <a:spcPct val="104000"/>
+              </a:lnSpc>
+              <a:spcAft>
+                <a:spcPts val="300"/>
+              </a:spcAft>
+            </a:pPr>
+            <a:r>
+              <a:rPr sz="1800" b="1">
+                <a:solidFill>
+                  <a:srgbClr val="177A4C"/>
+                </a:solidFill>
+                <a:latin typeface="Calibri"/>
+              </a:rPr>
+              <a:t>Al repositorio sube el resumen, no la base: código, modelos ya entrenados y resultados precalculados (8,86 MB).</a:t>
+            </a:r>
+          </a:p>
+          <a:p>
+            <a:pPr algn="ctr">
+              <a:lnSpc>
+                <a:spcPct val="104000"/>
               </a:lnSpc>
               <a:spcAft>
                 <a:spcPts val="0"/>
               </a:spcAft>
             </a:pPr>
             <a:r>
-              <a:rPr sz="1800" b="1">
-                <a:solidFill>
-                  <a:srgbClr val="177A4C"/>
+              <a:rPr sz="1800" b="0">
+                <a:solidFill>
+                  <a:srgbClr val="1E232B"/>
                 </a:solidFill>
                 <a:latin typeface="Calibri"/>
               </a:rPr>
-              <a:t>Los microdatos se quedan en la máquina: los 601,3 MB de la ENAHO no viajan al repositorio, que enlaza a la fuente oficial del INEI.</a:t>
+              <a:t>Los 601,3 MB de microdatos se quedan en la máquina; el README deja el enlace al portal del INEI para quien quiera descargarlos y reproducir todo.</a:t>
             </a:r>
           </a:p>
         </p:txBody>
@@ -9523,7 +10345,7 @@
         </p:blipFill>
         <p:spPr>
           <a:xfrm>
-            <a:off x="852572" y="2066543"/>
+            <a:off x="566928" y="2066543"/>
             <a:ext cx="10483807" cy="2834640"/>
           </a:xfrm>
           <a:prstGeom prst="rect">
@@ -9539,8 +10361,317 @@
         </p:nvSpPr>
         <p:spPr>
           <a:xfrm>
-            <a:off x="566928" y="5020055"/>
-            <a:ext cx="11055096" cy="1142999"/>
+            <a:off x="566928" y="4846320"/>
+            <a:ext cx="3246120" cy="749808"/>
+          </a:xfrm>
+          <a:prstGeom prst="roundRect">
+            <a:avLst>
+              <a:gd name="adj" fmla="val 5000"/>
+            </a:avLst>
+          </a:prstGeom>
+          <a:solidFill>
+            <a:srgbClr val="FCFBF8"/>
+          </a:solidFill>
+          <a:ln w="15875">
+            <a:solidFill>
+              <a:srgbClr val="D5D1C6"/>
+            </a:solidFill>
+          </a:ln>
+          <a:effectLst/>
+        </p:spPr>
+        <p:style>
+          <a:lnRef idx="1">
+            <a:schemeClr val="accent1"/>
+          </a:lnRef>
+          <a:fillRef idx="3">
+            <a:schemeClr val="accent1"/>
+          </a:fillRef>
+          <a:effectRef idx="2">
+            <a:schemeClr val="accent1"/>
+          </a:effectRef>
+          <a:fontRef idx="minor">
+            <a:schemeClr val="lt1"/>
+          </a:fontRef>
+        </p:style>
+        <p:txBody>
+          <a:bodyPr rtlCol="0" anchor="t" wrap="square" lIns="182880" rIns="182880" tIns="128016" bIns="128016"/>
+          <a:lstStyle/>
+          <a:p>
+            <a:pPr algn="ctr">
+              <a:spcAft>
+                <a:spcPts val="100"/>
+              </a:spcAft>
+            </a:pPr>
+            <a:r>
+              <a:rPr sz="2000" b="1">
+                <a:solidFill>
+                  <a:srgbClr val="177A4C"/>
+                </a:solidFill>
+                <a:latin typeface="Consolas"/>
+              </a:rPr>
+              <a:t>601,3 MB</a:t>
+            </a:r>
+          </a:p>
+          <a:p>
+            <a:pPr algn="ctr">
+              <a:spcAft>
+                <a:spcPts val="0"/>
+              </a:spcAft>
+            </a:pPr>
+            <a:r>
+              <a:rPr sz="1800" b="0">
+                <a:solidFill>
+                  <a:srgbClr val="49525F"/>
+                </a:solidFill>
+                <a:latin typeface="Calibri"/>
+              </a:rPr>
+              <a:t>la base, se queda en casa</a:t>
+            </a:r>
+          </a:p>
+        </p:txBody>
+      </p:sp>
+      <p:sp>
+        <p:nvSpPr>
+          <p:cNvPr id="7" name="Rounded Rectangle 6"/>
+          <p:cNvSpPr/>
+          <p:nvPr/>
+        </p:nvSpPr>
+        <p:spPr>
+          <a:xfrm>
+            <a:off x="4261104" y="4846320"/>
+            <a:ext cx="3246120" cy="749808"/>
+          </a:xfrm>
+          <a:prstGeom prst="roundRect">
+            <a:avLst>
+              <a:gd name="adj" fmla="val 5000"/>
+            </a:avLst>
+          </a:prstGeom>
+          <a:solidFill>
+            <a:srgbClr val="FCFBF8"/>
+          </a:solidFill>
+          <a:ln w="15875">
+            <a:solidFill>
+              <a:srgbClr val="D5D1C6"/>
+            </a:solidFill>
+          </a:ln>
+          <a:effectLst/>
+        </p:spPr>
+        <p:style>
+          <a:lnRef idx="1">
+            <a:schemeClr val="accent1"/>
+          </a:lnRef>
+          <a:fillRef idx="3">
+            <a:schemeClr val="accent1"/>
+          </a:fillRef>
+          <a:effectRef idx="2">
+            <a:schemeClr val="accent1"/>
+          </a:effectRef>
+          <a:fontRef idx="minor">
+            <a:schemeClr val="lt1"/>
+          </a:fontRef>
+        </p:style>
+        <p:txBody>
+          <a:bodyPr rtlCol="0" anchor="t" wrap="square" lIns="182880" rIns="182880" tIns="128016" bIns="128016"/>
+          <a:lstStyle/>
+          <a:p>
+            <a:pPr algn="ctr">
+              <a:spcAft>
+                <a:spcPts val="100"/>
+              </a:spcAft>
+            </a:pPr>
+            <a:r>
+              <a:rPr sz="1900" b="1">
+                <a:solidFill>
+                  <a:srgbClr val="4353CC"/>
+                </a:solidFill>
+                <a:latin typeface="Consolas"/>
+              </a:rPr>
+              <a:t>8,86 MB</a:t>
+            </a:r>
+          </a:p>
+          <a:p>
+            <a:pPr algn="ctr">
+              <a:spcAft>
+                <a:spcPts val="0"/>
+              </a:spcAft>
+            </a:pPr>
+            <a:r>
+              <a:rPr sz="1800" b="0">
+                <a:solidFill>
+                  <a:srgbClr val="49525F"/>
+                </a:solidFill>
+                <a:latin typeface="Calibri"/>
+              </a:rPr>
+              <a:t>el resumen, viaja al repo</a:t>
+            </a:r>
+          </a:p>
+        </p:txBody>
+      </p:sp>
+      <p:sp>
+        <p:nvSpPr>
+          <p:cNvPr id="8" name="Rounded Rectangle 7"/>
+          <p:cNvSpPr/>
+          <p:nvPr/>
+        </p:nvSpPr>
+        <p:spPr>
+          <a:xfrm>
+            <a:off x="7955279" y="4846320"/>
+            <a:ext cx="3666744" cy="749808"/>
+          </a:xfrm>
+          <a:prstGeom prst="roundRect">
+            <a:avLst>
+              <a:gd name="adj" fmla="val 5000"/>
+            </a:avLst>
+          </a:prstGeom>
+          <a:solidFill>
+            <a:srgbClr val="FCFBF8"/>
+          </a:solidFill>
+          <a:ln w="15875">
+            <a:solidFill>
+              <a:srgbClr val="D5D1C6"/>
+            </a:solidFill>
+          </a:ln>
+          <a:effectLst/>
+        </p:spPr>
+        <p:style>
+          <a:lnRef idx="1">
+            <a:schemeClr val="accent1"/>
+          </a:lnRef>
+          <a:fillRef idx="3">
+            <a:schemeClr val="accent1"/>
+          </a:fillRef>
+          <a:effectRef idx="2">
+            <a:schemeClr val="accent1"/>
+          </a:effectRef>
+          <a:fontRef idx="minor">
+            <a:schemeClr val="lt1"/>
+          </a:fontRef>
+        </p:style>
+        <p:txBody>
+          <a:bodyPr rtlCol="0" anchor="t" wrap="square" lIns="182880" rIns="182880" tIns="128016" bIns="128016"/>
+          <a:lstStyle/>
+          <a:p>
+            <a:pPr algn="ctr">
+              <a:spcAft>
+                <a:spcPts val="100"/>
+              </a:spcAft>
+            </a:pPr>
+            <a:r>
+              <a:rPr sz="1800" b="1">
+                <a:solidFill>
+                  <a:srgbClr val="3542B8"/>
+                </a:solidFill>
+                <a:latin typeface="Consolas"/>
+              </a:rPr>
+              <a:t>44,7 KB</a:t>
+            </a:r>
+          </a:p>
+          <a:p>
+            <a:pPr algn="ctr">
+              <a:spcAft>
+                <a:spcPts val="0"/>
+              </a:spcAft>
+            </a:pPr>
+            <a:r>
+              <a:rPr sz="1800" b="0">
+                <a:solidFill>
+                  <a:srgbClr val="49525F"/>
+                </a:solidFill>
+                <a:latin typeface="Calibri"/>
+              </a:rPr>
+              <a:t>lo que la app lee en cada visita</a:t>
+            </a:r>
+          </a:p>
+        </p:txBody>
+      </p:sp>
+      <p:sp>
+        <p:nvSpPr>
+          <p:cNvPr id="9" name="TextBox 8"/>
+          <p:cNvSpPr txBox="1"/>
+          <p:nvPr/>
+        </p:nvSpPr>
+        <p:spPr>
+          <a:xfrm>
+            <a:off x="3813048" y="5038344"/>
+            <a:ext cx="448056" cy="365760"/>
+          </a:xfrm>
+          <a:prstGeom prst="rect">
+            <a:avLst/>
+          </a:prstGeom>
+          <a:noFill/>
+        </p:spPr>
+        <p:txBody>
+          <a:bodyPr wrap="square" lIns="0" rIns="0" tIns="0" bIns="0">
+            <a:spAutoFit/>
+          </a:bodyPr>
+          <a:lstStyle/>
+          <a:p>
+            <a:pPr algn="ctr">
+              <a:spcAft>
+                <a:spcPts val="0"/>
+              </a:spcAft>
+            </a:pPr>
+            <a:r>
+              <a:rPr sz="2000" b="1">
+                <a:solidFill>
+                  <a:srgbClr val="5F6875"/>
+                </a:solidFill>
+                <a:latin typeface="Consolas"/>
+              </a:rPr>
+              <a:t>→</a:t>
+            </a:r>
+          </a:p>
+        </p:txBody>
+      </p:sp>
+      <p:sp>
+        <p:nvSpPr>
+          <p:cNvPr id="10" name="TextBox 9"/>
+          <p:cNvSpPr txBox="1"/>
+          <p:nvPr/>
+        </p:nvSpPr>
+        <p:spPr>
+          <a:xfrm>
+            <a:off x="7507223" y="5038344"/>
+            <a:ext cx="448056" cy="365760"/>
+          </a:xfrm>
+          <a:prstGeom prst="rect">
+            <a:avLst/>
+          </a:prstGeom>
+          <a:noFill/>
+        </p:spPr>
+        <p:txBody>
+          <a:bodyPr wrap="square" lIns="0" rIns="0" tIns="0" bIns="0">
+            <a:spAutoFit/>
+          </a:bodyPr>
+          <a:lstStyle/>
+          <a:p>
+            <a:pPr algn="ctr">
+              <a:spcAft>
+                <a:spcPts val="0"/>
+              </a:spcAft>
+            </a:pPr>
+            <a:r>
+              <a:rPr sz="2000" b="1">
+                <a:solidFill>
+                  <a:srgbClr val="5F6875"/>
+                </a:solidFill>
+                <a:latin typeface="Consolas"/>
+              </a:rPr>
+              <a:t>→</a:t>
+            </a:r>
+          </a:p>
+        </p:txBody>
+      </p:sp>
+      <p:sp>
+        <p:nvSpPr>
+          <p:cNvPr id="11" name="Rounded Rectangle 10"/>
+          <p:cNvSpPr/>
+          <p:nvPr/>
+        </p:nvSpPr>
+        <p:spPr>
+          <a:xfrm>
+            <a:off x="566928" y="5760720"/>
+            <a:ext cx="11055096" cy="512064"/>
           </a:xfrm>
           <a:prstGeom prst="roundRect">
             <a:avLst>
@@ -9599,7 +10730,7 @@
               <a:t>  →  </a:t>
             </a:r>
             <a:r>
-              <a:rPr sz="2600" b="1">
+              <a:rPr sz="2000" b="1">
                 <a:solidFill>
                   <a:srgbClr val="177A4C"/>
                 </a:solidFill>
@@ -9635,7 +10766,7 @@
               <a:t>  →  </a:t>
             </a:r>
             <a:r>
-              <a:rPr sz="2600" b="1">
+              <a:rPr sz="2000" b="1">
                 <a:solidFill>
                   <a:srgbClr val="4353CC"/>
                 </a:solidFill>
@@ -9662,7 +10793,7 @@
               <a:t>  →  </a:t>
             </a:r>
             <a:r>
-              <a:rPr sz="2600" b="1">
+              <a:rPr sz="2000" b="1">
                 <a:solidFill>
                   <a:srgbClr val="3542B8"/>
                 </a:solidFill>
@@ -9675,7 +10806,7 @@
       </p:sp>
       <p:sp>
         <p:nvSpPr>
-          <p:cNvPr id="7" name="TextBox 6"/>
+          <p:cNvPr id="12" name="TextBox 11"/>
           <p:cNvSpPr txBox="1"/>
           <p:nvPr/>
         </p:nvSpPr>
@@ -12163,8 +13294,8 @@
         </p:nvSpPr>
         <p:spPr>
           <a:xfrm>
-            <a:off x="566928" y="5413248"/>
-            <a:ext cx="11055096" cy="822960"/>
+            <a:off x="566928" y="5486400"/>
+            <a:ext cx="11055096" cy="786384"/>
           </a:xfrm>
           <a:prstGeom prst="roundRect">
             <a:avLst>
